--- a/exports/AIDEN_西电产学研课题介绍.pptx
+++ b/exports/AIDEN_西电产学研课题介绍.pptx
@@ -6981,7 +6981,7 @@
                 <a:latin typeface="微软雅黑"/>
                 <a:ea typeface="微软雅黑"/>
               </a:rPr>
-              <a:t>群里用短稿，宣讲用 PPT，细读用 Word，收表用 Excel</a:t>
+              <a:t>四件套：Word · PPT · 选题表 · 发群一页稿</a:t>
             </a:r>
           </a:p>
         </p:txBody>
@@ -7074,8 +7074,8 @@
         </p:nvSpPr>
         <p:spPr>
           <a:xfrm>
-            <a:off x="411480" y="1463040"/>
-            <a:ext cx="2194560" cy="3017520"/>
+            <a:off x="640080" y="1463040"/>
+            <a:ext cx="2697480" cy="3017520"/>
           </a:xfrm>
           <a:prstGeom prst="roundRect">
             <a:avLst>
@@ -7120,8 +7120,8 @@
         </p:nvSpPr>
         <p:spPr>
           <a:xfrm>
-            <a:off x="411480" y="1463040"/>
-            <a:ext cx="2194560" cy="109728"/>
+            <a:off x="640080" y="1463040"/>
+            <a:ext cx="2697480" cy="109728"/>
           </a:xfrm>
           <a:prstGeom prst="rect">
             <a:avLst/>
@@ -7164,8 +7164,8 @@
         </p:nvSpPr>
         <p:spPr>
           <a:xfrm>
-            <a:off x="502920" y="1828800"/>
-            <a:ext cx="2011680" cy="822960"/>
+            <a:off x="749808" y="1828800"/>
+            <a:ext cx="2468880" cy="822960"/>
           </a:xfrm>
           <a:prstGeom prst="rect">
             <a:avLst/>
@@ -7180,14 +7180,14 @@
           <a:p>
             <a:pPr algn="ctr"/>
             <a:r>
-              <a:rPr sz="1800" b="1">
+              <a:rPr sz="2000" b="1">
                 <a:solidFill>
                   <a:srgbClr val="0B3D5C"/>
                 </a:solidFill>
                 <a:latin typeface="微软雅黑"/>
                 <a:ea typeface="微软雅黑"/>
               </a:rPr>
-              <a:t>PPT</a:t>
+              <a:t>Word</a:t>
             </a:r>
           </a:p>
         </p:txBody>
@@ -7200,8 +7200,8 @@
         </p:nvSpPr>
         <p:spPr>
           <a:xfrm>
-            <a:off x="521208" y="2697480"/>
-            <a:ext cx="1975104" cy="1463040"/>
+            <a:off x="786384" y="2697480"/>
+            <a:ext cx="2395728" cy="1463040"/>
           </a:xfrm>
           <a:prstGeom prst="rect">
             <a:avLst/>
@@ -7216,14 +7216,14 @@
           <a:p>
             <a:pPr algn="ctr"/>
             <a:r>
-              <a:rPr sz="1300" b="0">
+              <a:rPr sz="1400" b="0">
                 <a:solidFill>
                   <a:srgbClr val="1A2A33"/>
                 </a:solidFill>
                 <a:latin typeface="微软雅黑"/>
                 <a:ea typeface="微软雅黑"/>
               </a:rPr>
-              <a:t>课堂或线上宣讲 15 分钟</a:t>
+              <a:t>完整课题介绍，老师留底、同学细读</a:t>
             </a:r>
           </a:p>
         </p:txBody>
@@ -7236,8 +7236,8 @@
         </p:nvSpPr>
         <p:spPr>
           <a:xfrm>
-            <a:off x="2743200" y="1463040"/>
-            <a:ext cx="2194560" cy="3017520"/>
+            <a:off x="3520439" y="1463040"/>
+            <a:ext cx="2697480" cy="3017520"/>
           </a:xfrm>
           <a:prstGeom prst="roundRect">
             <a:avLst>
@@ -7282,8 +7282,8 @@
         </p:nvSpPr>
         <p:spPr>
           <a:xfrm>
-            <a:off x="2743200" y="1463040"/>
-            <a:ext cx="2194560" cy="109728"/>
+            <a:off x="3520439" y="1463040"/>
+            <a:ext cx="2697480" cy="109728"/>
           </a:xfrm>
           <a:prstGeom prst="rect">
             <a:avLst/>
@@ -7326,8 +7326,8 @@
         </p:nvSpPr>
         <p:spPr>
           <a:xfrm>
-            <a:off x="2834640" y="1828800"/>
-            <a:ext cx="2011680" cy="822960"/>
+            <a:off x="3630168" y="1828800"/>
+            <a:ext cx="2468880" cy="822960"/>
           </a:xfrm>
           <a:prstGeom prst="rect">
             <a:avLst/>
@@ -7342,14 +7342,14 @@
           <a:p>
             <a:pPr algn="ctr"/>
             <a:r>
-              <a:rPr sz="1800" b="1">
+              <a:rPr sz="2000" b="1">
                 <a:solidFill>
                   <a:srgbClr val="0B3D5C"/>
                 </a:solidFill>
                 <a:latin typeface="微软雅黑"/>
                 <a:ea typeface="微软雅黑"/>
               </a:rPr>
-              <a:t>Word</a:t>
+              <a:t>PPT</a:t>
             </a:r>
           </a:p>
         </p:txBody>
@@ -7362,8 +7362,8 @@
         </p:nvSpPr>
         <p:spPr>
           <a:xfrm>
-            <a:off x="2852928" y="2697480"/>
-            <a:ext cx="1975104" cy="1463040"/>
+            <a:off x="3666744" y="2697480"/>
+            <a:ext cx="2395728" cy="1463040"/>
           </a:xfrm>
           <a:prstGeom prst="rect">
             <a:avLst/>
@@ -7378,14 +7378,14 @@
           <a:p>
             <a:pPr algn="ctr"/>
             <a:r>
-              <a:rPr sz="1300" b="0">
+              <a:rPr sz="1400" b="0">
                 <a:solidFill>
                   <a:srgbClr val="1A2A33"/>
                 </a:solidFill>
                 <a:latin typeface="微软雅黑"/>
                 <a:ea typeface="微软雅黑"/>
               </a:rPr>
-              <a:t>老师留底、同学细读每题任务</a:t>
+              <a:t>课堂或线上宣讲 15 分钟</a:t>
             </a:r>
           </a:p>
         </p:txBody>
@@ -7398,8 +7398,8 @@
         </p:nvSpPr>
         <p:spPr>
           <a:xfrm>
-            <a:off x="5074920" y="1463040"/>
-            <a:ext cx="2194560" cy="3017520"/>
+            <a:off x="6400800" y="1463040"/>
+            <a:ext cx="2697480" cy="3017520"/>
           </a:xfrm>
           <a:prstGeom prst="roundRect">
             <a:avLst>
@@ -7444,8 +7444,8 @@
         </p:nvSpPr>
         <p:spPr>
           <a:xfrm>
-            <a:off x="5074920" y="1463040"/>
-            <a:ext cx="2194560" cy="109728"/>
+            <a:off x="6400800" y="1463040"/>
+            <a:ext cx="2697480" cy="109728"/>
           </a:xfrm>
           <a:prstGeom prst="rect">
             <a:avLst/>
@@ -7488,8 +7488,8 @@
         </p:nvSpPr>
         <p:spPr>
           <a:xfrm>
-            <a:off x="5166359" y="1828800"/>
-            <a:ext cx="2011680" cy="822960"/>
+            <a:off x="6510528" y="1828800"/>
+            <a:ext cx="2468880" cy="822960"/>
           </a:xfrm>
           <a:prstGeom prst="rect">
             <a:avLst/>
@@ -7504,14 +7504,14 @@
           <a:p>
             <a:pPr algn="ctr"/>
             <a:r>
-              <a:rPr sz="1800" b="1">
+              <a:rPr sz="2000" b="1">
                 <a:solidFill>
                   <a:srgbClr val="0B3D5C"/>
                 </a:solidFill>
                 <a:latin typeface="微软雅黑"/>
                 <a:ea typeface="微软雅黑"/>
               </a:rPr>
-              <a:t>Excel</a:t>
+              <a:t>选题表</a:t>
             </a:r>
           </a:p>
         </p:txBody>
@@ -7524,8 +7524,8 @@
         </p:nvSpPr>
         <p:spPr>
           <a:xfrm>
-            <a:off x="5184648" y="2697480"/>
-            <a:ext cx="1975104" cy="1463040"/>
+            <a:off x="6547104" y="2697480"/>
+            <a:ext cx="2395728" cy="1463040"/>
           </a:xfrm>
           <a:prstGeom prst="rect">
             <a:avLst/>
@@ -7540,14 +7540,14 @@
           <a:p>
             <a:pPr algn="ctr"/>
             <a:r>
-              <a:rPr sz="1300" b="0">
+              <a:rPr sz="1400" b="0">
                 <a:solidFill>
                   <a:srgbClr val="1A2A33"/>
                 </a:solidFill>
                 <a:latin typeface="微软雅黑"/>
                 <a:ea typeface="微软雅黑"/>
               </a:rPr>
-              <a:t>志愿、编组、技能、时间表</a:t>
+              <a:t>Excel：志愿、编组、技能</a:t>
             </a:r>
           </a:p>
         </p:txBody>
@@ -7560,8 +7560,8 @@
         </p:nvSpPr>
         <p:spPr>
           <a:xfrm>
-            <a:off x="7406640" y="1463040"/>
-            <a:ext cx="2194560" cy="3017520"/>
+            <a:off x="9281159" y="1463040"/>
+            <a:ext cx="2697480" cy="3017520"/>
           </a:xfrm>
           <a:prstGeom prst="roundRect">
             <a:avLst>
@@ -7606,8 +7606,8 @@
         </p:nvSpPr>
         <p:spPr>
           <a:xfrm>
-            <a:off x="7406640" y="1463040"/>
-            <a:ext cx="2194560" cy="109728"/>
+            <a:off x="9281159" y="1463040"/>
+            <a:ext cx="2697480" cy="109728"/>
           </a:xfrm>
           <a:prstGeom prst="rect">
             <a:avLst/>
@@ -7650,8 +7650,8 @@
         </p:nvSpPr>
         <p:spPr>
           <a:xfrm>
-            <a:off x="7498079" y="1828800"/>
-            <a:ext cx="2011680" cy="822960"/>
+            <a:off x="9390887" y="1828800"/>
+            <a:ext cx="2468880" cy="822960"/>
           </a:xfrm>
           <a:prstGeom prst="rect">
             <a:avLst/>
@@ -7666,14 +7666,14 @@
           <a:p>
             <a:pPr algn="ctr"/>
             <a:r>
-              <a:rPr sz="1800" b="1">
+              <a:rPr sz="2000" b="1">
                 <a:solidFill>
                   <a:srgbClr val="0B3D5C"/>
                 </a:solidFill>
                 <a:latin typeface="微软雅黑"/>
                 <a:ea typeface="微软雅黑"/>
               </a:rPr>
-              <a:t>群发短稿</a:t>
+              <a:t>一页稿</a:t>
             </a:r>
           </a:p>
         </p:txBody>
@@ -7686,8 +7686,8 @@
         </p:nvSpPr>
         <p:spPr>
           <a:xfrm>
-            <a:off x="7516367" y="2697480"/>
-            <a:ext cx="1975104" cy="1463040"/>
+            <a:off x="9427463" y="2697480"/>
+            <a:ext cx="2395728" cy="1463040"/>
           </a:xfrm>
           <a:prstGeom prst="rect">
             <a:avLst/>
@@ -7702,183 +7702,21 @@
           <a:p>
             <a:pPr algn="ctr"/>
             <a:r>
-              <a:rPr sz="1300" b="0">
+              <a:rPr sz="1400" b="0">
                 <a:solidFill>
                   <a:srgbClr val="1A2A33"/>
                 </a:solidFill>
                 <a:latin typeface="微软雅黑"/>
                 <a:ea typeface="微软雅黑"/>
               </a:rPr>
-              <a:t>直接粘贴到学生群</a:t>
-            </a:r>
-          </a:p>
-        </p:txBody>
-      </p:sp>
-      <p:sp>
-        <p:nvSpPr>
-          <p:cNvPr id="24" name="Rounded Rectangle 23"/>
-          <p:cNvSpPr/>
-          <p:nvPr/>
-        </p:nvSpPr>
-        <p:spPr>
-          <a:xfrm>
-            <a:off x="9738359" y="1463040"/>
-            <a:ext cx="2194560" cy="3017520"/>
-          </a:xfrm>
-          <a:prstGeom prst="roundRect">
-            <a:avLst>
-              <a:gd name="adj" fmla="val 8000"/>
-            </a:avLst>
-          </a:prstGeom>
-          <a:solidFill>
-            <a:srgbClr val="E8F3F1"/>
-          </a:solidFill>
-          <a:ln>
-            <a:noFill/>
-          </a:ln>
-          <a:effectLst/>
-        </p:spPr>
-        <p:style>
-          <a:lnRef idx="1">
-            <a:schemeClr val="accent1"/>
-          </a:lnRef>
-          <a:fillRef idx="3">
-            <a:schemeClr val="accent1"/>
-          </a:fillRef>
-          <a:effectRef idx="2">
-            <a:schemeClr val="accent1"/>
-          </a:effectRef>
-          <a:fontRef idx="minor">
-            <a:schemeClr val="lt1"/>
-          </a:fontRef>
-        </p:style>
-        <p:txBody>
-          <a:bodyPr rtlCol="0" anchor="ctr"/>
-          <a:lstStyle/>
-          <a:p>
-            <a:pPr algn="ctr"/>
-          </a:p>
-        </p:txBody>
-      </p:sp>
-      <p:sp>
-        <p:nvSpPr>
-          <p:cNvPr id="25" name="Rectangle 24"/>
-          <p:cNvSpPr/>
-          <p:nvPr/>
-        </p:nvSpPr>
-        <p:spPr>
-          <a:xfrm>
-            <a:off x="9738359" y="1463040"/>
-            <a:ext cx="2194560" cy="109728"/>
-          </a:xfrm>
-          <a:prstGeom prst="rect">
-            <a:avLst/>
-          </a:prstGeom>
-          <a:solidFill>
-            <a:srgbClr val="C4A35A"/>
-          </a:solidFill>
-          <a:ln>
-            <a:noFill/>
-          </a:ln>
-          <a:effectLst/>
-        </p:spPr>
-        <p:style>
-          <a:lnRef idx="1">
-            <a:schemeClr val="accent1"/>
-          </a:lnRef>
-          <a:fillRef idx="3">
-            <a:schemeClr val="accent1"/>
-          </a:fillRef>
-          <a:effectRef idx="2">
-            <a:schemeClr val="accent1"/>
-          </a:effectRef>
-          <a:fontRef idx="minor">
-            <a:schemeClr val="lt1"/>
-          </a:fontRef>
-        </p:style>
-        <p:txBody>
-          <a:bodyPr rtlCol="0" anchor="ctr"/>
-          <a:lstStyle/>
-          <a:p>
-            <a:pPr algn="ctr"/>
-          </a:p>
-        </p:txBody>
-      </p:sp>
-      <p:sp>
-        <p:nvSpPr>
-          <p:cNvPr id="26" name="TextBox 25"/>
-          <p:cNvSpPr txBox="1"/>
-          <p:nvPr/>
-        </p:nvSpPr>
-        <p:spPr>
-          <a:xfrm>
-            <a:off x="9829799" y="1828800"/>
-            <a:ext cx="2011680" cy="822960"/>
-          </a:xfrm>
-          <a:prstGeom prst="rect">
-            <a:avLst/>
-          </a:prstGeom>
-          <a:noFill/>
-        </p:spPr>
-        <p:txBody>
-          <a:bodyPr wrap="square" lIns="0" rIns="0" tIns="0" bIns="0" anchor="t">
-            <a:spAutoFit/>
-          </a:bodyPr>
-          <a:lstStyle/>
-          <a:p>
-            <a:pPr algn="ctr"/>
-            <a:r>
-              <a:rPr sz="1800" b="1">
-                <a:solidFill>
-                  <a:srgbClr val="0B3D5C"/>
-                </a:solidFill>
-                <a:latin typeface="微软雅黑"/>
-                <a:ea typeface="微软雅黑"/>
-              </a:rPr>
-              <a:t>HTML</a:t>
-            </a:r>
-          </a:p>
-        </p:txBody>
-      </p:sp>
-      <p:sp>
-        <p:nvSpPr>
-          <p:cNvPr id="27" name="TextBox 26"/>
-          <p:cNvSpPr txBox="1"/>
-          <p:nvPr/>
-        </p:nvSpPr>
-        <p:spPr>
-          <a:xfrm>
-            <a:off x="9848087" y="2697480"/>
-            <a:ext cx="1975104" cy="1463040"/>
-          </a:xfrm>
-          <a:prstGeom prst="rect">
-            <a:avLst/>
-          </a:prstGeom>
-          <a:noFill/>
-        </p:spPr>
-        <p:txBody>
-          <a:bodyPr wrap="square" lIns="0" rIns="0" tIns="0" bIns="0" anchor="t">
-            <a:spAutoFit/>
-          </a:bodyPr>
-          <a:lstStyle/>
-          <a:p>
-            <a:pPr algn="ctr"/>
-            <a:r>
-              <a:rPr sz="1300" b="0">
-                <a:solidFill>
-                  <a:srgbClr val="1A2A33"/>
-                </a:solidFill>
-                <a:latin typeface="微软雅黑"/>
-                <a:ea typeface="微软雅黑"/>
-              </a:rPr>
-              <a:t>浏览器打开的一页总览</a:t>
-            </a:r>
-          </a:p>
-        </p:txBody>
-      </p:sp>
-      <p:sp>
-        <p:nvSpPr>
-          <p:cNvPr id="28" name="TextBox 27"/>
+              <a:t>Markdown，直接粘贴学生群</a:t>
+            </a:r>
+          </a:p>
+        </p:txBody>
+      </p:sp>
+      <p:sp>
+        <p:nvSpPr>
+          <p:cNvPr id="24" name="TextBox 23"/>
           <p:cNvSpPr txBox="1"/>
           <p:nvPr/>
         </p:nvSpPr>
@@ -8844,7 +8682,7 @@
                 <a:latin typeface="微软雅黑"/>
                 <a:ea typeface="微软雅黑"/>
               </a:rPr>
-              <a:t>配套：PPT · Word · Excel 选题表 · 群发短稿 · HTML 一页总览</a:t>
+              <a:t>配套：PPT · Word · Excel 选题表 · 发群一页稿（Markdown）</a:t>
             </a:r>
           </a:p>
         </p:txBody>
